--- a/intro.sequential/Images.pptx
+++ b/intro.sequential/Images.pptx
@@ -601,7 +601,7 @@
           <a:lstStyle/>
           <a:p>
             <a:r>
-              <a:rPr lang="en-GB"/>
+              <a:rPr lang="en-GB" dirty="0"/>
               <a:t>Stimulating</a:t>
             </a:r>
             <a:endParaRPr lang="en-DK" dirty="0"/>
@@ -777,8 +777,8 @@
           <a:lstStyle/>
           <a:p>
             <a:r>
-              <a:rPr lang="en-US" dirty="0"/>
-              <a:t>Clear</a:t>
+              <a:rPr lang="en-US"/>
+              <a:t>Empty</a:t>
             </a:r>
             <a:endParaRPr lang="en-DK" dirty="0"/>
           </a:p>
